--- a/Smart_Study_Final_Submission.pptx
+++ b/Smart_Study_Final_Submission.pptx
@@ -10197,7 +10197,7 @@
                 </a:solidFill>
                 <a:latin typeface="Aptos"/>
               </a:rPr>
-              <a:t>59 ML-service tests and 49 backend tests pass, plus end-to-end runs on the Docker stack.</a:t>
+              <a:t>67 ML-service tests and 53 backend tests pass, plus end-to-end runs on the Docker stack.</a:t>
             </a:r>
           </a:p>
         </p:txBody>
@@ -20653,7 +20653,7 @@
       </p:sp>
       <p:pic>
         <p:nvPicPr>
-          <p:cNvPr id="30" name="Practice panel screenshot" descr="slide-practice.png"/>
+          <p:cNvPr id="30" name="Practice panel screenshot" descr="Take a test from your question bank: question type Both (6), 6 questions and a Start test button."/>
           <p:cNvPicPr>
             <a:picLocks noChangeAspect="1"/>
           </p:cNvPicPr>
@@ -20667,8 +20667,8 @@
         </p:blipFill>
         <p:spPr>
           <a:xfrm>
-            <a:off x="5778500" y="2133600"/>
-            <a:ext cx="5613400" cy="1092874"/>
+            <a:off x="5849297" y="2133600"/>
+            <a:ext cx="5471805" cy="1092874"/>
           </a:xfrm>
           <a:prstGeom prst="rect">
             <a:avLst/>
@@ -20682,7 +20682,7 @@
       </p:pic>
       <p:pic>
         <p:nvPicPr>
-          <p:cNvPr id="31" name="Test review screenshot" descr="slide-review.png"/>
+          <p:cNvPr id="31" name="Test review screenshot" descr="Test review of a written answer on Kruskal's algorithm: the answer, feedback, a 0% score and an AI-writing check of 37%, uncertain."/>
           <p:cNvPicPr>
             <a:picLocks noChangeAspect="1"/>
           </p:cNvPicPr>
@@ -20696,8 +20696,8 @@
         </p:blipFill>
         <p:spPr>
           <a:xfrm>
-            <a:off x="5778500" y="3340100"/>
-            <a:ext cx="5613400" cy="2076461"/>
+            <a:off x="5875492" y="3340100"/>
+            <a:ext cx="5419416" cy="2076461"/>
           </a:xfrm>
           <a:prstGeom prst="rect">
             <a:avLst/>
@@ -21501,7 +21501,7 @@
       </p:sp>
       <p:pic>
         <p:nvPicPr>
-          <p:cNvPr id="30" name="Authenticity result screenshot" descr="slide-authenticity.png"/>
+          <p:cNvPr id="30" name="Authenticity result screenshot" descr="Authenticity check of 7,260 characters: overall 42%, uncertain; section 3 likely AI-written at 68%, section 4 likely human-written at 34%."/>
           <p:cNvPicPr>
             <a:picLocks noChangeAspect="1"/>
           </p:cNvPicPr>
@@ -21515,8 +21515,8 @@
         </p:blipFill>
         <p:spPr>
           <a:xfrm>
-            <a:off x="749300" y="2133600"/>
-            <a:ext cx="5588000" cy="2531908"/>
+            <a:off x="1174464" y="2133600"/>
+            <a:ext cx="4737672" cy="2531908"/>
           </a:xfrm>
           <a:prstGeom prst="rect">
             <a:avLst/>
